--- a/STARLAB_Slide_Decks_All/16_Designing_a_Research_Poster_or_Presentation_Board.pptx
+++ b/STARLAB_Slide_Decks_All/16_Designing_a_Research_Poster_or_Presentation_Board.pptx
@@ -1563,7 +1563,7 @@
             </a:br>
             <a:r>
               <a:rPr lang="en-US"/>
-              <a:t>Required print materials:</a:t>
+              <a:t>Required student copies for primary Week 28 use:</a:t>
             </a:r>
             <a:br>
               <a:rPr lang="en-US"/>
@@ -1591,28 +1591,28 @@
             </a:br>
             <a:r>
               <a:rPr lang="en-US"/>
-              <a:t>• Unit 5 Appendix F: Graphing Standards</a:t>
+              <a:t>Required student copies for secondary Week 32 use:</a:t>
             </a:r>
             <a:br>
               <a:rPr lang="en-US"/>
             </a:br>
             <a:r>
               <a:rPr lang="en-US"/>
-              <a:t>• Unit 5 Appendix G: Figure and Table Caption Guide</a:t>
+              <a:t>• Unit 6 Student Handout 10: Final Showcase Readiness Checklist</a:t>
             </a:r>
             <a:br>
               <a:rPr lang="en-US"/>
             </a:br>
             <a:r>
               <a:rPr lang="en-US"/>
-              <a:t>• Unit 6 Student Handout 1: Final Presentation Readiness Check</a:t>
+              <a:t>• Unit 6 Student Handout 11: Presentation Product Final Check</a:t>
             </a:r>
             <a:br>
               <a:rPr lang="en-US"/>
             </a:br>
             <a:r>
               <a:rPr lang="en-US"/>
-              <a:t>• Unit 6 Student Handout 11: Presentation Product Final Check</a:t>
+              <a:t>• Unit 6 Student Handout 12: Professionalism and Showcase Expectations</a:t>
             </a:r>
             <a:br>
               <a:rPr lang="en-US"/>
@@ -1622,35 +1622,35 @@
             </a:br>
             <a:r>
               <a:rPr lang="en-US"/>
-              <a:t>Optional support materials:</a:t>
+              <a:t>Optional / teacher reference:</a:t>
             </a:r>
             <a:br>
               <a:rPr lang="en-US"/>
             </a:br>
             <a:r>
               <a:rPr lang="en-US"/>
-              <a:t>• Unit 4 Student Handout 9: Graph and Visual Selection Tool</a:t>
+              <a:t>• Unit 5 Appendix Q: Question Bank for Practice Presentations</a:t>
             </a:r>
             <a:br>
               <a:rPr lang="en-US"/>
             </a:br>
             <a:r>
               <a:rPr lang="en-US"/>
-              <a:t>• Unit 4 Student Handout 10: Graph Construction Checklist</a:t>
+              <a:t>• Unit 6 Appendix I: Showcase Planning Guide for Teachers</a:t>
             </a:r>
             <a:br>
               <a:rPr lang="en-US"/>
             </a:br>
             <a:r>
               <a:rPr lang="en-US"/>
-              <a:t>• Unit 4 Student Handout 12: Figure Caption Drafting</a:t>
+              <a:t>• Unit 6 Appendix J: Sample Showcase Schedule</a:t>
             </a:r>
             <a:br>
               <a:rPr lang="en-US"/>
             </a:br>
             <a:r>
               <a:rPr lang="en-US"/>
-              <a:t>• Unit 6 Student Handout 10: Final Showcase Readiness Checklist</a:t>
+              <a:t>• Unit 6 Appendix K: Visitor Question Guide</a:t>
             </a:r>
             <a:endParaRPr/>
           </a:p>
